--- a/gyeongsan/GSJOB2_4교시_워크숍_총정리.pptx
+++ b/gyeongsan/GSJOB2_4교시_워크숍_총정리.pptx
@@ -3118,7 +3118,7 @@
             <a:avLst/>
           </a:prstGeom>
           <a:solidFill>
-            <a:srgbClr val="F1F7F5"/>
+            <a:srgbClr val="F2F5F9"/>
           </a:solidFill>
           <a:ln>
             <a:noFill/>
@@ -3238,7 +3238,7 @@
             <a:avLst/>
           </a:prstGeom>
           <a:solidFill>
-            <a:srgbClr val="EEF5F2"/>
+            <a:srgbClr val="EFF3F8"/>
           </a:solidFill>
           <a:ln>
             <a:noFill/>
@@ -3328,7 +3328,7 @@
             <a:avLst/>
           </a:prstGeom>
           <a:solidFill>
-            <a:srgbClr val="E1EEE9"/>
+            <a:srgbClr val="E3EAF3"/>
           </a:solidFill>
           <a:ln>
             <a:noFill/>
@@ -3433,7 +3433,7 @@
             <a:r>
               <a:rPr sz="2400" b="1" spc="120">
                 <a:solidFill>
-                  <a:srgbClr val="1E7F5B"/>
+                  <a:srgbClr val="2B5FA8"/>
                 </a:solidFill>
                 <a:latin typeface="Pretendard"/>
                 <a:ea typeface="Pretendard"/>
@@ -3636,7 +3636,7 @@
             <a:avLst/>
           </a:prstGeom>
           <a:solidFill>
-            <a:srgbClr val="F3F8F6"/>
+            <a:srgbClr val="F4F7FA"/>
           </a:solidFill>
           <a:ln>
             <a:noFill/>
@@ -3741,7 +3741,7 @@
             <a:r>
               <a:rPr sz="2400" b="1">
                 <a:solidFill>
-                  <a:srgbClr val="1E7F5B"/>
+                  <a:srgbClr val="2B5FA8"/>
                 </a:solidFill>
                 <a:latin typeface="Pretendard"/>
                 <a:ea typeface="Pretendard"/>
@@ -3979,7 +3979,7 @@
             <a:avLst/>
           </a:prstGeom>
           <a:solidFill>
-            <a:srgbClr val="F3F8F6"/>
+            <a:srgbClr val="F4F7FA"/>
           </a:solidFill>
           <a:ln>
             <a:noFill/>
@@ -4071,7 +4071,7 @@
             </a:avLst>
           </a:prstGeom>
           <a:solidFill>
-            <a:srgbClr val="1E7F5B"/>
+            <a:srgbClr val="2B5FA8"/>
           </a:solidFill>
           <a:ln>
             <a:noFill/>
@@ -4187,7 +4187,7 @@
             <a:r>
               <a:rPr sz="1950" b="1" spc="160">
                 <a:solidFill>
-                  <a:srgbClr val="1E7F5B"/>
+                  <a:srgbClr val="2B5FA8"/>
                 </a:solidFill>
                 <a:latin typeface="Pretendard"/>
                 <a:ea typeface="Pretendard"/>
@@ -5074,7 +5074,7 @@
             <a:avLst/>
           </a:prstGeom>
           <a:solidFill>
-            <a:srgbClr val="C3E6D8"/>
+            <a:srgbClr val="C9DAF2"/>
           </a:solidFill>
           <a:ln>
             <a:noFill/>
@@ -5275,7 +5275,7 @@
             <a:avLst/>
           </a:prstGeom>
           <a:solidFill>
-            <a:srgbClr val="F3F8F6"/>
+            <a:srgbClr val="F4F7FA"/>
           </a:solidFill>
           <a:ln>
             <a:noFill/>
@@ -5380,7 +5380,7 @@
             <a:r>
               <a:rPr sz="1950" b="1" spc="160">
                 <a:solidFill>
-                  <a:srgbClr val="1E7F5B"/>
+                  <a:srgbClr val="2B5FA8"/>
                 </a:solidFill>
                 <a:latin typeface="Pretendard"/>
                 <a:ea typeface="Pretendard"/>
@@ -6063,11 +6063,11 @@
             </a:avLst>
           </a:prstGeom>
           <a:solidFill>
-            <a:srgbClr val="E6F4EE"/>
+            <a:srgbClr val="EAF0F8"/>
           </a:solidFill>
           <a:ln w="9525">
             <a:solidFill>
-              <a:srgbClr val="C3E6D8"/>
+              <a:srgbClr val="C9DAF2"/>
             </a:solidFill>
           </a:ln>
           <a:effectLst/>
@@ -6266,7 +6266,7 @@
             <a:avLst/>
           </a:prstGeom>
           <a:solidFill>
-            <a:srgbClr val="F3F8F6"/>
+            <a:srgbClr val="F4F7FA"/>
           </a:solidFill>
           <a:ln>
             <a:noFill/>
@@ -6371,7 +6371,7 @@
             <a:r>
               <a:rPr sz="2400" b="1">
                 <a:solidFill>
-                  <a:srgbClr val="1E7F5B"/>
+                  <a:srgbClr val="2B5FA8"/>
                 </a:solidFill>
                 <a:latin typeface="Pretendard"/>
                 <a:ea typeface="Pretendard"/>
@@ -6609,7 +6609,7 @@
             <a:avLst/>
           </a:prstGeom>
           <a:solidFill>
-            <a:srgbClr val="F3F8F6"/>
+            <a:srgbClr val="F4F7FA"/>
           </a:solidFill>
           <a:ln>
             <a:noFill/>
@@ -6714,7 +6714,7 @@
             <a:r>
               <a:rPr sz="1950" b="1" spc="160">
                 <a:solidFill>
-                  <a:srgbClr val="1E7F5B"/>
+                  <a:srgbClr val="2B5FA8"/>
                 </a:solidFill>
                 <a:latin typeface="Pretendard"/>
                 <a:ea typeface="Pretendard"/>
@@ -7050,7 +7050,7 @@
             <a:avLst/>
           </a:prstGeom>
           <a:solidFill>
-            <a:srgbClr val="1E7F5B"/>
+            <a:srgbClr val="2B5FA8"/>
           </a:solidFill>
           <a:ln>
             <a:noFill/>
@@ -7378,7 +7378,7 @@
             <a:avLst/>
           </a:prstGeom>
           <a:solidFill>
-            <a:srgbClr val="1E7F5B"/>
+            <a:srgbClr val="2B5FA8"/>
           </a:solidFill>
           <a:ln>
             <a:noFill/>
@@ -7638,7 +7638,7 @@
             <a:avLst/>
           </a:prstGeom>
           <a:solidFill>
-            <a:srgbClr val="F3F8F6"/>
+            <a:srgbClr val="F4F7FA"/>
           </a:solidFill>
           <a:ln>
             <a:noFill/>
@@ -7743,7 +7743,7 @@
             <a:r>
               <a:rPr sz="1950" b="1" spc="160">
                 <a:solidFill>
-                  <a:srgbClr val="1E7F5B"/>
+                  <a:srgbClr val="2B5FA8"/>
                 </a:solidFill>
                 <a:latin typeface="Pretendard"/>
                 <a:ea typeface="Pretendard"/>
@@ -8280,11 +8280,11 @@
             </a:avLst>
           </a:prstGeom>
           <a:solidFill>
-            <a:srgbClr val="E6F4EE"/>
+            <a:srgbClr val="EAF0F8"/>
           </a:solidFill>
           <a:ln w="9525">
             <a:solidFill>
-              <a:srgbClr val="C3E6D8"/>
+              <a:srgbClr val="C9DAF2"/>
             </a:solidFill>
           </a:ln>
           <a:effectLst/>
@@ -8483,7 +8483,7 @@
             <a:avLst/>
           </a:prstGeom>
           <a:solidFill>
-            <a:srgbClr val="F3F8F6"/>
+            <a:srgbClr val="F4F7FA"/>
           </a:solidFill>
           <a:ln>
             <a:noFill/>
@@ -8588,7 +8588,7 @@
             <a:r>
               <a:rPr sz="2400" b="1">
                 <a:solidFill>
-                  <a:srgbClr val="1E7F5B"/>
+                  <a:srgbClr val="2B5FA8"/>
                 </a:solidFill>
                 <a:latin typeface="Pretendard"/>
                 <a:ea typeface="Pretendard"/>
@@ -8745,7 +8745,7 @@
             <a:r>
               <a:rPr sz="2475" b="1">
                 <a:solidFill>
-                  <a:srgbClr val="1E7F5B"/>
+                  <a:srgbClr val="2B5FA8"/>
                 </a:solidFill>
                 <a:latin typeface="Pretendard"/>
                 <a:ea typeface="Pretendard"/>
@@ -8861,7 +8861,7 @@
             <a:r>
               <a:rPr sz="2475" b="1">
                 <a:solidFill>
-                  <a:srgbClr val="1E7F5B"/>
+                  <a:srgbClr val="2B5FA8"/>
                 </a:solidFill>
                 <a:latin typeface="Pretendard"/>
                 <a:ea typeface="Pretendard"/>
@@ -8977,7 +8977,7 @@
             <a:r>
               <a:rPr sz="2475" b="1">
                 <a:solidFill>
-                  <a:srgbClr val="1E7F5B"/>
+                  <a:srgbClr val="2B5FA8"/>
                 </a:solidFill>
                 <a:latin typeface="Pretendard"/>
                 <a:ea typeface="Pretendard"/>
@@ -9093,7 +9093,7 @@
             <a:r>
               <a:rPr sz="2475" b="1">
                 <a:solidFill>
-                  <a:srgbClr val="1E7F5B"/>
+                  <a:srgbClr val="2B5FA8"/>
                 </a:solidFill>
                 <a:latin typeface="Pretendard"/>
                 <a:ea typeface="Pretendard"/>
@@ -9160,7 +9160,7 @@
             <a:avLst/>
           </a:prstGeom>
           <a:solidFill>
-            <a:srgbClr val="1E7F5B"/>
+            <a:srgbClr val="2B5FA8"/>
           </a:solidFill>
           <a:ln>
             <a:noFill/>
@@ -9205,7 +9205,7 @@
             <a:r>
               <a:rPr sz="1800" b="1" spc="140">
                 <a:solidFill>
-                  <a:srgbClr val="1E7F5B"/>
+                  <a:srgbClr val="2B5FA8"/>
                 </a:solidFill>
                 <a:latin typeface="Pretendard"/>
                 <a:ea typeface="Pretendard"/>
@@ -9290,7 +9290,7 @@
             <a:avLst/>
           </a:prstGeom>
           <a:solidFill>
-            <a:srgbClr val="F3F8F6"/>
+            <a:srgbClr val="F4F7FA"/>
           </a:solidFill>
           <a:ln>
             <a:noFill/>
@@ -9395,7 +9395,7 @@
             <a:r>
               <a:rPr sz="1950" b="1" spc="160">
                 <a:solidFill>
-                  <a:srgbClr val="1E7F5B"/>
+                  <a:srgbClr val="2B5FA8"/>
                 </a:solidFill>
                 <a:latin typeface="Pretendard"/>
                 <a:ea typeface="Pretendard"/>
@@ -9492,7 +9492,7 @@
             <a:avLst/>
           </a:prstGeom>
           <a:solidFill>
-            <a:srgbClr val="C3E6D8"/>
+            <a:srgbClr val="C9DAF2"/>
           </a:solidFill>
           <a:ln>
             <a:noFill/>
@@ -9537,7 +9537,7 @@
             <a:r>
               <a:rPr sz="1950" b="1">
                 <a:solidFill>
-                  <a:srgbClr val="1E7F5B"/>
+                  <a:srgbClr val="2B5FA8"/>
                 </a:solidFill>
                 <a:latin typeface="Pretendard"/>
                 <a:ea typeface="Pretendard"/>
@@ -9563,7 +9563,7 @@
             <a:avLst/>
           </a:prstGeom>
           <a:solidFill>
-            <a:srgbClr val="1E7F5B"/>
+            <a:srgbClr val="2B5FA8"/>
           </a:solidFill>
           <a:ln>
             <a:noFill/>
@@ -9713,7 +9713,7 @@
             <a:r>
               <a:rPr sz="1500" b="1" spc="120">
                 <a:solidFill>
-                  <a:srgbClr val="1E7F5B"/>
+                  <a:srgbClr val="2B5FA8"/>
                 </a:solidFill>
                 <a:latin typeface="Pretendard"/>
                 <a:ea typeface="Pretendard"/>
@@ -9795,7 +9795,7 @@
             <a:r>
               <a:rPr sz="1950" b="1">
                 <a:solidFill>
-                  <a:srgbClr val="1E7F5B"/>
+                  <a:srgbClr val="2B5FA8"/>
                 </a:solidFill>
                 <a:latin typeface="Pretendard"/>
                 <a:ea typeface="Pretendard"/>
@@ -9821,7 +9821,7 @@
             <a:avLst/>
           </a:prstGeom>
           <a:solidFill>
-            <a:srgbClr val="1E7F5B"/>
+            <a:srgbClr val="2B5FA8"/>
           </a:solidFill>
           <a:ln>
             <a:noFill/>
@@ -9971,7 +9971,7 @@
             <a:r>
               <a:rPr sz="1500" b="1" spc="120">
                 <a:solidFill>
-                  <a:srgbClr val="1E7F5B"/>
+                  <a:srgbClr val="2B5FA8"/>
                 </a:solidFill>
                 <a:latin typeface="Pretendard"/>
                 <a:ea typeface="Pretendard"/>
@@ -10053,7 +10053,7 @@
             <a:r>
               <a:rPr sz="1950" b="1">
                 <a:solidFill>
-                  <a:srgbClr val="1E7F5B"/>
+                  <a:srgbClr val="2B5FA8"/>
                 </a:solidFill>
                 <a:latin typeface="Pretendard"/>
                 <a:ea typeface="Pretendard"/>
@@ -10079,7 +10079,7 @@
             <a:avLst/>
           </a:prstGeom>
           <a:solidFill>
-            <a:srgbClr val="1E7F5B"/>
+            <a:srgbClr val="2B5FA8"/>
           </a:solidFill>
           <a:ln>
             <a:noFill/>
@@ -10229,7 +10229,7 @@
             <a:r>
               <a:rPr sz="1500" b="1" spc="120">
                 <a:solidFill>
-                  <a:srgbClr val="1E7F5B"/>
+                  <a:srgbClr val="2B5FA8"/>
                 </a:solidFill>
                 <a:latin typeface="Pretendard"/>
                 <a:ea typeface="Pretendard"/>
@@ -10369,7 +10369,7 @@
             </a:avLst>
           </a:prstGeom>
           <a:solidFill>
-            <a:srgbClr val="E6F4EE"/>
+            <a:srgbClr val="EAF0F8"/>
           </a:solidFill>
           <a:ln w="19050">
             <a:solidFill>
@@ -10487,7 +10487,7 @@
             <a:r>
               <a:rPr sz="1500" b="1" spc="120">
                 <a:solidFill>
-                  <a:srgbClr val="1E7F5B"/>
+                  <a:srgbClr val="2B5FA8"/>
                 </a:solidFill>
                 <a:latin typeface="Pretendard"/>
                 <a:ea typeface="Pretendard"/>
@@ -10684,7 +10684,7 @@
             <a:avLst/>
           </a:prstGeom>
           <a:solidFill>
-            <a:srgbClr val="F3F8F6"/>
+            <a:srgbClr val="F4F7FA"/>
           </a:solidFill>
           <a:ln>
             <a:noFill/>
@@ -10789,7 +10789,7 @@
             <a:r>
               <a:rPr sz="1950" b="1" spc="160">
                 <a:solidFill>
-                  <a:srgbClr val="1E7F5B"/>
+                  <a:srgbClr val="2B5FA8"/>
                 </a:solidFill>
                 <a:latin typeface="Pretendard"/>
                 <a:ea typeface="Pretendard"/>
@@ -11472,11 +11472,11 @@
             </a:avLst>
           </a:prstGeom>
           <a:solidFill>
-            <a:srgbClr val="E6F4EE"/>
+            <a:srgbClr val="EAF0F8"/>
           </a:solidFill>
           <a:ln w="9525">
             <a:solidFill>
-              <a:srgbClr val="C3E6D8"/>
+              <a:srgbClr val="C9DAF2"/>
             </a:solidFill>
           </a:ln>
           <a:effectLst/>
@@ -11675,7 +11675,7 @@
             <a:avLst/>
           </a:prstGeom>
           <a:solidFill>
-            <a:srgbClr val="F3F8F6"/>
+            <a:srgbClr val="F4F7FA"/>
           </a:solidFill>
           <a:ln>
             <a:noFill/>
@@ -11780,7 +11780,7 @@
             <a:r>
               <a:rPr sz="1950" b="1" spc="160">
                 <a:solidFill>
-                  <a:srgbClr val="1E7F5B"/>
+                  <a:srgbClr val="2B5FA8"/>
                 </a:solidFill>
                 <a:latin typeface="Pretendard"/>
                 <a:ea typeface="Pretendard"/>
@@ -12116,7 +12116,7 @@
             <a:avLst/>
           </a:prstGeom>
           <a:solidFill>
-            <a:srgbClr val="1E7F5B"/>
+            <a:srgbClr val="2B5FA8"/>
           </a:solidFill>
           <a:ln>
             <a:noFill/>
@@ -12444,7 +12444,7 @@
             <a:avLst/>
           </a:prstGeom>
           <a:solidFill>
-            <a:srgbClr val="1E7F5B"/>
+            <a:srgbClr val="2B5FA8"/>
           </a:solidFill>
           <a:ln>
             <a:noFill/>
@@ -12868,7 +12868,7 @@
             <a:avLst/>
           </a:prstGeom>
           <a:solidFill>
-            <a:srgbClr val="F3F8F6"/>
+            <a:srgbClr val="F4F7FA"/>
           </a:solidFill>
           <a:ln>
             <a:noFill/>
@@ -12973,7 +12973,7 @@
             <a:r>
               <a:rPr sz="2400" b="1">
                 <a:solidFill>
-                  <a:srgbClr val="1E7F5B"/>
+                  <a:srgbClr val="2B5FA8"/>
                 </a:solidFill>
                 <a:latin typeface="Pretendard"/>
                 <a:ea typeface="Pretendard"/>
@@ -13211,7 +13211,7 @@
             <a:avLst/>
           </a:prstGeom>
           <a:solidFill>
-            <a:srgbClr val="F3F8F6"/>
+            <a:srgbClr val="F4F7FA"/>
           </a:solidFill>
           <a:ln>
             <a:noFill/>
@@ -13316,7 +13316,7 @@
             <a:r>
               <a:rPr sz="1950" b="1" spc="160">
                 <a:solidFill>
-                  <a:srgbClr val="1E7F5B"/>
+                  <a:srgbClr val="2B5FA8"/>
                 </a:solidFill>
                 <a:latin typeface="Pretendard"/>
                 <a:ea typeface="Pretendard"/>
@@ -14063,7 +14063,7 @@
             <a:avLst/>
           </a:prstGeom>
           <a:solidFill>
-            <a:srgbClr val="C3E6D8"/>
+            <a:srgbClr val="C9DAF2"/>
           </a:solidFill>
           <a:ln>
             <a:noFill/>
@@ -14264,7 +14264,7 @@
             <a:avLst/>
           </a:prstGeom>
           <a:solidFill>
-            <a:srgbClr val="F3F8F6"/>
+            <a:srgbClr val="F4F7FA"/>
           </a:solidFill>
           <a:ln>
             <a:noFill/>
@@ -14369,7 +14369,7 @@
             <a:r>
               <a:rPr sz="2400" b="1">
                 <a:solidFill>
-                  <a:srgbClr val="1E7F5B"/>
+                  <a:srgbClr val="2B5FA8"/>
                 </a:solidFill>
                 <a:latin typeface="Pretendard"/>
                 <a:ea typeface="Pretendard"/>
@@ -14607,7 +14607,7 @@
             <a:avLst/>
           </a:prstGeom>
           <a:solidFill>
-            <a:srgbClr val="F3F8F6"/>
+            <a:srgbClr val="F4F7FA"/>
           </a:solidFill>
           <a:ln>
             <a:noFill/>
@@ -14712,7 +14712,7 @@
             <a:r>
               <a:rPr sz="1950" b="1" spc="160">
                 <a:solidFill>
-                  <a:srgbClr val="1E7F5B"/>
+                  <a:srgbClr val="2B5FA8"/>
                 </a:solidFill>
                 <a:latin typeface="Pretendard"/>
                 <a:ea typeface="Pretendard"/>
@@ -14925,7 +14925,7 @@
             <a:avLst/>
           </a:prstGeom>
           <a:solidFill>
-            <a:srgbClr val="1E7F5B"/>
+            <a:srgbClr val="2B5FA8"/>
           </a:solidFill>
           <a:ln>
             <a:noFill/>
@@ -14996,7 +14996,7 @@
             <a:avLst/>
           </a:prstGeom>
           <a:solidFill>
-            <a:srgbClr val="1E7F5B"/>
+            <a:srgbClr val="2B5FA8"/>
           </a:solidFill>
           <a:ln>
             <a:noFill/>
@@ -15067,7 +15067,7 @@
             <a:avLst/>
           </a:prstGeom>
           <a:solidFill>
-            <a:srgbClr val="1E7F5B"/>
+            <a:srgbClr val="2B5FA8"/>
           </a:solidFill>
           <a:ln>
             <a:noFill/>
@@ -15254,7 +15254,7 @@
             <a:avLst/>
           </a:prstGeom>
           <a:solidFill>
-            <a:srgbClr val="1E7F5B"/>
+            <a:srgbClr val="2B5FA8"/>
           </a:solidFill>
           <a:ln>
             <a:noFill/>
@@ -15325,7 +15325,7 @@
             <a:avLst/>
           </a:prstGeom>
           <a:solidFill>
-            <a:srgbClr val="1E7F5B"/>
+            <a:srgbClr val="2B5FA8"/>
           </a:solidFill>
           <a:ln>
             <a:noFill/>
@@ -15396,7 +15396,7 @@
             <a:avLst/>
           </a:prstGeom>
           <a:solidFill>
-            <a:srgbClr val="1E7F5B"/>
+            <a:srgbClr val="2B5FA8"/>
           </a:solidFill>
           <a:ln>
             <a:noFill/>
@@ -15668,7 +15668,7 @@
             <a:avLst/>
           </a:prstGeom>
           <a:solidFill>
-            <a:srgbClr val="F3F8F6"/>
+            <a:srgbClr val="F4F7FA"/>
           </a:solidFill>
           <a:ln>
             <a:noFill/>
@@ -15760,7 +15760,7 @@
             </a:avLst>
           </a:prstGeom>
           <a:solidFill>
-            <a:srgbClr val="1E7F5B"/>
+            <a:srgbClr val="2B5FA8"/>
           </a:solidFill>
           <a:ln>
             <a:noFill/>
@@ -15876,7 +15876,7 @@
             <a:r>
               <a:rPr sz="1950" b="1" spc="160">
                 <a:solidFill>
-                  <a:srgbClr val="1E7F5B"/>
+                  <a:srgbClr val="2B5FA8"/>
                 </a:solidFill>
                 <a:latin typeface="Pretendard"/>
                 <a:ea typeface="Pretendard"/>
@@ -15988,7 +15988,7 @@
             <a:r>
               <a:rPr sz="2250" b="1">
                 <a:solidFill>
-                  <a:srgbClr val="1E7F5B"/>
+                  <a:srgbClr val="2B5FA8"/>
                 </a:solidFill>
                 <a:latin typeface="Pretendard"/>
                 <a:ea typeface="Pretendard"/>
@@ -16160,7 +16160,7 @@
             <a:avLst/>
           </a:prstGeom>
           <a:solidFill>
-            <a:srgbClr val="1E7F5B"/>
+            <a:srgbClr val="2B5FA8"/>
           </a:solidFill>
           <a:ln>
             <a:noFill/>
@@ -16205,7 +16205,7 @@
             <a:r>
               <a:rPr sz="1875" b="1" spc="150">
                 <a:solidFill>
-                  <a:srgbClr val="1E7F5B"/>
+                  <a:srgbClr val="2B5FA8"/>
                 </a:solidFill>
                 <a:latin typeface="Pretendard"/>
                 <a:ea typeface="Pretendard"/>
